--- a/FloodView_Problem_Solution_Boxes.pptx
+++ b/FloodView_Problem_Solution_Boxes.pptx
@@ -1754,7 +1754,7 @@
                           <a:ea typeface="Calibri" pitchFamily="34" charset="-122"/>
                           <a:cs typeface="Calibri" pitchFamily="34" charset="-120"/>
                         </a:rPr>
-                        <a:t>JalRaksha</a:t>
+                        <a:t>FloodView</a:t>
                       </a:r>
                       <a:endParaRPr lang="en-US" sz="1050" dirty="0">
                         <a:latin typeface="Calibri" charset="0"/>
